--- a/docs/부품비교_FM동일프로토콜_1p_2026-08-13.pptx
+++ b/docs/부품비교_FM동일프로토콜_1p_2026-08-13.pptx
@@ -3275,7 +3275,7 @@
                 <a:latin typeface="Apple SD Gothic Neo"/>
                 <a:ea typeface="Apple SD Gothic Neo"/>
               </a:rPr>
-              <a:t>FM 부품 = Chronos-2f(zero-shot) vs Moirai-small(zero-shot) · 참고 = 직접학습 LSTM(분기별 확장창 학습) · LLM ICL 암은 오염 문제로 채점 불성립(제외).</a:t>
+              <a:t>FM 부품 = Chronos-2f(zero-shot) vs Moirai-small(zero-shot — BISTRO의 기반 모델 계열, 공개 체크포인트 프록시) · 참고 = 직접학습 LSTM · LLM ICL 암은 오염 문제로 채점 불성립(제외).</a:t>
             </a:r>
           </a:p>
         </p:txBody>
@@ -3482,7 +3482,7 @@
         <p:spPr>
           <a:xfrm>
             <a:off x="7452360" y="1965960"/>
-            <a:ext cx="41148" cy="1783080"/>
+            <a:ext cx="41148" cy="1371600"/>
           </a:xfrm>
           <a:prstGeom prst="rect">
             <a:avLst/>
@@ -3526,7 +3526,7 @@
         <p:spPr>
           <a:xfrm>
             <a:off x="7635240" y="1965960"/>
-            <a:ext cx="4023359" cy="1828800"/>
+            <a:ext cx="4023359" cy="1417320"/>
           </a:xfrm>
           <a:prstGeom prst="rect">
             <a:avLst/>
@@ -3562,7 +3562,7 @@
               </a:spcAft>
             </a:pPr>
             <a:r>
-              <a:rPr sz="1000" b="0">
+              <a:rPr sz="950" b="0">
                 <a:solidFill>
                   <a:srgbClr val="262626"/>
                 </a:solidFill>
@@ -3579,14 +3579,14 @@
               </a:spcAft>
             </a:pPr>
             <a:r>
-              <a:rPr sz="1000" b="0">
+              <a:rPr sz="950" b="0">
                 <a:solidFill>
                   <a:srgbClr val="262626"/>
                 </a:solidFill>
                 <a:latin typeface="Apple SD Gothic Neo"/>
                 <a:ea typeface="Apple SD Gothic Neo"/>
               </a:rPr>
-              <a:t>— Chronos-2f 0.924 ≈ GBM 0.924 (통과) /</a:t>
+              <a:t>— Chronos-2f 0.924 ≈ GBM 0.924 (통과) / Moirai 1.021 ·</a:t>
             </a:r>
           </a:p>
           <a:p>
@@ -3596,14 +3596,14 @@
               </a:spcAft>
             </a:pPr>
             <a:r>
-              <a:rPr sz="1000" b="0">
+              <a:rPr sz="950" b="0">
                 <a:solidFill>
                   <a:srgbClr val="262626"/>
                 </a:solidFill>
                 <a:latin typeface="Apple SD Gothic Neo"/>
                 <a:ea typeface="Apple SD Gothic Neo"/>
               </a:rPr>
-              <a:t>Moirai 1.021 (미달) / LSTM 1.286 (미달).</a:t>
+              <a:t>LSTM 1.286 (미달). 슬롯 결과가 그대로 따라오며, 두 FM을</a:t>
             </a:r>
           </a:p>
           <a:p>
@@ -3613,14 +3613,14 @@
               </a:spcAft>
             </a:pPr>
             <a:r>
-              <a:rPr sz="1000" b="0">
+              <a:rPr sz="950" b="0">
                 <a:solidFill>
                   <a:srgbClr val="262626"/>
                 </a:solidFill>
                 <a:latin typeface="Apple SD Gothic Neo"/>
                 <a:ea typeface="Apple SD Gothic Neo"/>
               </a:rPr>
-              <a:t>슬롯 결과가 그대로 따라옵니다: C2f만 개선(0.740),</a:t>
+              <a:t>함께 넣어도(듀오 0.745) C2f 단독 슬롯(0.740)을 못 넘습니다</a:t>
             </a:r>
           </a:p>
           <a:p>
@@ -3630,48 +3630,14 @@
               </a:spcAft>
             </a:pPr>
             <a:r>
-              <a:rPr sz="1000" b="0">
+              <a:rPr sz="950" b="0">
                 <a:solidFill>
                   <a:srgbClr val="262626"/>
                 </a:solidFill>
                 <a:latin typeface="Apple SD Gothic Neo"/>
                 <a:ea typeface="Apple SD Gothic Neo"/>
               </a:rPr>
-              <a:t>Moirai(0.754)·LSTM(0.777)은 기준선(0.750)보다 악화.</a:t>
-            </a:r>
-          </a:p>
-          <a:p>
-            <a:pPr algn="l">
-              <a:spcAft>
-                <a:spcPts val="200"/>
-              </a:spcAft>
-            </a:pPr>
-            <a:r>
-              <a:rPr sz="1000" b="0">
-                <a:solidFill>
-                  <a:srgbClr val="262626"/>
-                </a:solidFill>
-                <a:latin typeface="Apple SD Gothic Neo"/>
-                <a:ea typeface="Apple SD Gothic Neo"/>
-              </a:rPr>
-              <a:t>두 FM을 함께 넣어도(C2f+Moirai 듀오 0.745) C2f</a:t>
-            </a:r>
-          </a:p>
-          <a:p>
-            <a:pPr algn="l">
-              <a:spcAft>
-                <a:spcPts val="200"/>
-              </a:spcAft>
-            </a:pPr>
-            <a:r>
-              <a:rPr sz="1000" b="0">
-                <a:solidFill>
-                  <a:srgbClr val="262626"/>
-                </a:solidFill>
-                <a:latin typeface="Apple SD Gothic Neo"/>
-                <a:ea typeface="Apple SD Gothic Neo"/>
-              </a:rPr>
-              <a:t>단독 슬롯을 못 넘습니다 — 오차 상관 0.926로 중복.</a:t>
+              <a:t>(오차 상관 0.926 — 정보 중복).</a:t>
             </a:r>
           </a:p>
         </p:txBody>
@@ -3684,8 +3650,8 @@
         </p:nvSpPr>
         <p:spPr>
           <a:xfrm>
-            <a:off x="7452360" y="3931920"/>
-            <a:ext cx="41148" cy="1463040"/>
+            <a:off x="7452360" y="3474720"/>
+            <a:ext cx="41148" cy="2286000"/>
           </a:xfrm>
           <a:prstGeom prst="rect">
             <a:avLst/>
@@ -3728,8 +3694,8 @@
         </p:nvSpPr>
         <p:spPr>
           <a:xfrm>
-            <a:off x="7635240" y="3931920"/>
-            <a:ext cx="4023359" cy="1508760"/>
+            <a:off x="7635240" y="3474720"/>
+            <a:ext cx="4023359" cy="2331720"/>
           </a:xfrm>
           <a:prstGeom prst="rect">
             <a:avLst/>
@@ -3744,7 +3710,7 @@
           <a:p>
             <a:pPr algn="l">
               <a:spcAft>
-                <a:spcPts val="200"/>
+                <a:spcPts val="180"/>
               </a:spcAft>
             </a:pPr>
             <a:r>
@@ -3755,92 +3721,197 @@
                 <a:latin typeface="Apple SD Gothic Neo"/>
                 <a:ea typeface="Apple SD Gothic Neo"/>
               </a:rPr>
-              <a:t>왜 같은 사전학습 FM인데 갈리는가</a:t>
+              <a:t>Chronos-2와 Moirai 계열, 무엇이 다른가</a:t>
             </a:r>
           </a:p>
           <a:p>
             <a:pPr algn="l">
               <a:spcAft>
-                <a:spcPts val="200"/>
+                <a:spcPts val="180"/>
               </a:spcAft>
             </a:pPr>
             <a:r>
-              <a:rPr sz="1000" b="0">
+              <a:rPr sz="950" b="0">
                 <a:solidFill>
                   <a:srgbClr val="262626"/>
                 </a:solidFill>
                 <a:latin typeface="Apple SD Gothic Neo"/>
                 <a:ea typeface="Apple SD Gothic Neo"/>
               </a:rPr>
-              <a:t>세대와 공변량 처리의 차이로 해석됩니다 — Chronos-2</a:t>
+              <a:t>둘 다 공변량을 입력받습니다 — 차이는 입력 지원 여부가</a:t>
             </a:r>
           </a:p>
           <a:p>
             <a:pPr algn="l">
               <a:spcAft>
-                <a:spcPts val="200"/>
+                <a:spcPts val="180"/>
               </a:spcAft>
             </a:pPr>
             <a:r>
-              <a:rPr sz="1000" b="0">
+              <a:rPr sz="950" b="0">
                 <a:solidFill>
                   <a:srgbClr val="262626"/>
                 </a:solidFill>
                 <a:latin typeface="Apple SD Gothic Neo"/>
                 <a:ea typeface="Apple SD Gothic Neo"/>
               </a:rPr>
-              <a:t>(2025, 공변량 네이티브 지원)는 빠른신호를 예측에 실제</a:t>
-            </a:r>
-          </a:p>
-          <a:p>
-            <a:pPr algn="l">
-              <a:spcAft>
-                <a:spcPts val="200"/>
-              </a:spcAft>
-            </a:pPr>
-            <a:r>
-              <a:rPr sz="1000" b="0">
+              <a:t>아니라 </a:t>
+            </a:r>
+            <a:r>
+              <a:rPr sz="950" b="1">
                 <a:solidFill>
                   <a:srgbClr val="262626"/>
                 </a:solidFill>
                 <a:latin typeface="Apple SD Gothic Neo"/>
                 <a:ea typeface="Apple SD Gothic Neo"/>
               </a:rPr>
-              <a:t>반영하는 반면, Moirai-1.0-small(2024, 91M)은 공변량</a:t>
-            </a:r>
-          </a:p>
-          <a:p>
-            <a:pPr algn="l">
-              <a:spcAft>
-                <a:spcPts val="200"/>
-              </a:spcAft>
-            </a:pPr>
-            <a:r>
-              <a:rPr sz="1000" b="0">
+              <a:t>“사전학습에서 공변량 쓰는 법을 배웠는가”</a:t>
+            </a:r>
+            <a:r>
+              <a:rPr sz="950" b="0">
                 <a:solidFill>
                   <a:srgbClr val="262626"/>
                 </a:solidFill>
                 <a:latin typeface="Apple SD Gothic Neo"/>
                 <a:ea typeface="Apple SD Gothic Neo"/>
               </a:rPr>
-              <a:t>활용이 얕아 조기 구간의 정보 이득을 살리지 못합니다.</a:t>
+              <a:t>입니다.</a:t>
             </a:r>
           </a:p>
           <a:p>
             <a:pPr algn="l">
               <a:spcAft>
-                <a:spcPts val="200"/>
+                <a:spcPts val="180"/>
               </a:spcAft>
             </a:pPr>
             <a:r>
-              <a:rPr sz="1000" b="1">
+              <a:rPr sz="950" b="0">
                 <a:solidFill>
                   <a:srgbClr val="262626"/>
                 </a:solidFill>
                 <a:latin typeface="Apple SD Gothic Neo"/>
                 <a:ea typeface="Apple SD Gothic Neo"/>
               </a:rPr>
-              <a:t>→ “사전학습이면 된다”가 아니라 부품별 실측이 필수.</a:t>
+              <a:t>· Chronos-2(2025.10): 공변량과 타깃의 의존관계가 설계된</a:t>
+            </a:r>
+          </a:p>
+          <a:p>
+            <a:pPr algn="l">
+              <a:spcAft>
+                <a:spcPts val="180"/>
+              </a:spcAft>
+            </a:pPr>
+            <a:r>
+              <a:rPr sz="950" b="0">
+                <a:solidFill>
+                  <a:srgbClr val="262626"/>
+                </a:solidFill>
+                <a:latin typeface="Apple SD Gothic Neo"/>
+                <a:ea typeface="Apple SD Gothic Neo"/>
+              </a:rPr>
+              <a:t>  코퍼스로 “공변량 조건부 예측” 과제 자체를 사전학습 —</a:t>
+            </a:r>
+          </a:p>
+          <a:p>
+            <a:pPr algn="l">
+              <a:spcAft>
+                <a:spcPts val="180"/>
+              </a:spcAft>
+            </a:pPr>
+            <a:r>
+              <a:rPr sz="950" b="0">
+                <a:solidFill>
+                  <a:srgbClr val="262626"/>
+                </a:solidFill>
+                <a:latin typeface="Apple SD Gothic Neo"/>
+                <a:ea typeface="Apple SD Gothic Neo"/>
+              </a:rPr>
+              <a:t>  처음 보는 신호(주가·환율)도 관계를 추론해 반영</a:t>
+            </a:r>
+          </a:p>
+          <a:p>
+            <a:pPr algn="l">
+              <a:spcAft>
+                <a:spcPts val="180"/>
+              </a:spcAft>
+            </a:pPr>
+            <a:r>
+              <a:rPr sz="950" b="0">
+                <a:solidFill>
+                  <a:srgbClr val="262626"/>
+                </a:solidFill>
+                <a:latin typeface="Apple SD Gothic Neo"/>
+                <a:ea typeface="Apple SD Gothic Neo"/>
+              </a:rPr>
+              <a:t>· Moirai(2024.03, ICML): 모든 변량을 한 시퀀스로 함께</a:t>
+            </a:r>
+          </a:p>
+          <a:p>
+            <a:pPr algn="l">
+              <a:spcAft>
+                <a:spcPts val="180"/>
+              </a:spcAft>
+            </a:pPr>
+            <a:r>
+              <a:rPr sz="950" b="0">
+                <a:solidFill>
+                  <a:srgbClr val="262626"/>
+                </a:solidFill>
+                <a:latin typeface="Apple SD Gothic Neo"/>
+                <a:ea typeface="Apple SD Gothic Neo"/>
+              </a:rPr>
+              <a:t>  모델링(any-variate) — 공변량 조건화를 별도 과제로</a:t>
+            </a:r>
+          </a:p>
+          <a:p>
+            <a:pPr algn="l">
+              <a:spcAft>
+                <a:spcPts val="180"/>
+              </a:spcAft>
+            </a:pPr>
+            <a:r>
+              <a:rPr sz="950" b="0">
+                <a:solidFill>
+                  <a:srgbClr val="262626"/>
+                </a:solidFill>
+                <a:latin typeface="Apple SD Gothic Neo"/>
+                <a:ea typeface="Apple SD Gothic Neo"/>
+              </a:rPr>
+              <a:t>  학습하지는 않아, 새 신호의 이득 전달이 상대적으로 약함</a:t>
+            </a:r>
+          </a:p>
+          <a:p>
+            <a:pPr algn="l">
+              <a:spcAft>
+                <a:spcPts val="180"/>
+              </a:spcAft>
+            </a:pPr>
+            <a:r>
+              <a:rPr sz="950" b="0">
+                <a:solidFill>
+                  <a:srgbClr val="262626"/>
+                </a:solidFill>
+                <a:latin typeface="Apple SD Gothic Neo"/>
+                <a:ea typeface="Apple SD Gothic Neo"/>
+              </a:rPr>
+              <a:t>· 체급도 다름: 본 실험은 small 변형(약 14M) vs C2 120M —</a:t>
+            </a:r>
+          </a:p>
+          <a:p>
+            <a:pPr algn="l">
+              <a:spcAft>
+                <a:spcPts val="180"/>
+              </a:spcAft>
+            </a:pPr>
+            <a:r>
+              <a:rPr sz="950" b="0">
+                <a:solidFill>
+                  <a:srgbClr val="262626"/>
+                </a:solidFill>
+                <a:latin typeface="Apple SD Gothic Neo"/>
+                <a:ea typeface="Apple SD Gothic Neo"/>
+              </a:rPr>
+              <a:t>  격차의 일부는 세대(과제 설계), 일부는 체급일 수 있음</a:t>
             </a:r>
           </a:p>
         </p:txBody>
@@ -3853,8 +3924,8 @@
         </p:nvSpPr>
         <p:spPr>
           <a:xfrm>
-            <a:off x="7452360" y="5577840"/>
-            <a:ext cx="4206240" cy="777240"/>
+            <a:off x="7452360" y="5870448"/>
+            <a:ext cx="4206240" cy="658368"/>
           </a:xfrm>
           <a:prstGeom prst="rect">
             <a:avLst/>
@@ -3897,8 +3968,8 @@
         </p:nvSpPr>
         <p:spPr>
           <a:xfrm>
-            <a:off x="7452360" y="5577840"/>
-            <a:ext cx="41148" cy="777240"/>
+            <a:off x="7452360" y="5870448"/>
+            <a:ext cx="41148" cy="658368"/>
           </a:xfrm>
           <a:prstGeom prst="rect">
             <a:avLst/>
@@ -3941,8 +4012,8 @@
         </p:nvSpPr>
         <p:spPr>
           <a:xfrm>
-            <a:off x="7635240" y="5641848"/>
-            <a:ext cx="3840479" cy="685800"/>
+            <a:off x="7635240" y="5916168"/>
+            <a:ext cx="3840479" cy="594360"/>
           </a:xfrm>
           <a:prstGeom prst="rect">
             <a:avLst/>
@@ -3968,7 +4039,27 @@
                 <a:latin typeface="Apple SD Gothic Neo"/>
                 <a:ea typeface="Apple SD Gothic Neo"/>
               </a:rPr>
-              <a:t>유의: BISTRO는 3-암 비교 프레임워크이며 본 실험은 그중 채점 가능한</a:t>
+              <a:t>유의: 본 실험의 Moirai는 공개 체크포인트 zero-shot </a:t>
+            </a:r>
+            <a:r>
+              <a:rPr sz="850" b="1">
+                <a:solidFill>
+                  <a:srgbClr val="6B6B6B"/>
+                </a:solidFill>
+                <a:latin typeface="Apple SD Gothic Neo"/>
+                <a:ea typeface="Apple SD Gothic Neo"/>
+              </a:rPr>
+              <a:t>프록시</a:t>
+            </a:r>
+            <a:r>
+              <a:rPr sz="850" b="0">
+                <a:solidFill>
+                  <a:srgbClr val="6B6B6B"/>
+                </a:solidFill>
+                <a:latin typeface="Apple SD Gothic Neo"/>
+                <a:ea typeface="Apple SD Gothic Neo"/>
+              </a:rPr>
+              <a:t>입니다. BISTRO</a:t>
             </a:r>
           </a:p>
           <a:p>
@@ -3985,7 +4076,7 @@
                 <a:latin typeface="Apple SD Gothic Neo"/>
                 <a:ea typeface="Apple SD Gothic Neo"/>
               </a:rPr>
-              <a:t>부품(FM 2종, 소형 모델 1종)의 GDP 과제 이식 실측입니다. LLM ICL 암은</a:t>
+              <a:t>원본(개량·미세조정 반영 가능)에 대한 판정이 아니며, 원본을 동일 규약으로</a:t>
             </a:r>
           </a:p>
           <a:p>
@@ -4002,7 +4093,7 @@
                 <a:latin typeface="Apple SD Gothic Neo"/>
                 <a:ea typeface="Apple SD Gothic Neo"/>
               </a:rPr>
-              <a:t>사전학습 오염으로 실시간 채점이 성립하지 않아 제외 (종합리포트 4장).</a:t>
+              <a:t>채점하면 직접 비교가 가능합니다. LLM ICL 암은 오염으로 채점 불성립(제외).</a:t>
             </a:r>
           </a:p>
         </p:txBody>

--- a/docs/부품비교_FM동일프로토콜_1p_2026-08-13.pptx
+++ b/docs/부품비교_FM동일프로토콜_1p_2026-08-13.pptx
@@ -3738,7 +3738,7 @@
                 <a:latin typeface="Apple SD Gothic Neo"/>
                 <a:ea typeface="Apple SD Gothic Neo"/>
               </a:rPr>
-              <a:t>둘 다 공변량을 입력받습니다 — 차이는 입력 지원 여부가</a:t>
+              <a:t>둘 다 공변량을 입력받습니다. 차이는 사전학습 때 공변량에게</a:t>
             </a:r>
           </a:p>
           <a:p>
@@ -3755,7 +3755,7 @@
                 <a:latin typeface="Apple SD Gothic Neo"/>
                 <a:ea typeface="Apple SD Gothic Neo"/>
               </a:rPr>
-              <a:t>아니라 </a:t>
+              <a:t>어떤 </a:t>
             </a:r>
             <a:r>
               <a:rPr sz="950" b="1">
@@ -3765,7 +3765,7 @@
                 <a:latin typeface="Apple SD Gothic Neo"/>
                 <a:ea typeface="Apple SD Gothic Neo"/>
               </a:rPr>
-              <a:t>“사전학습에서 공변량 쓰는 법을 배웠는가”</a:t>
+              <a:t>역할</a:t>
             </a:r>
             <a:r>
               <a:rPr sz="950" b="0">
@@ -3775,7 +3775,7 @@
                 <a:latin typeface="Apple SD Gothic Neo"/>
                 <a:ea typeface="Apple SD Gothic Neo"/>
               </a:rPr>
-              <a:t>입니다.</a:t>
+              <a:t>을 주고 훈련했는가입니다.</a:t>
             </a:r>
           </a:p>
           <a:p>
@@ -3792,7 +3792,7 @@
                 <a:latin typeface="Apple SD Gothic Neo"/>
                 <a:ea typeface="Apple SD Gothic Neo"/>
               </a:rPr>
-              <a:t>· Chronos-2(2025.10): 공변량과 타깃의 의존관계가 설계된</a:t>
+              <a:t>· Moirai(2024.03): “여러 시계열을 나란히 놓고 전부를 함께</a:t>
             </a:r>
           </a:p>
           <a:p>
@@ -3809,7 +3809,27 @@
                 <a:latin typeface="Apple SD Gothic Neo"/>
                 <a:ea typeface="Apple SD Gothic Neo"/>
               </a:rPr>
-              <a:t>  코퍼스로 “공변량 조건부 예측” 과제 자체를 사전학습 —</a:t>
+              <a:t>  예측하라”로 훈련 — 공변량은 </a:t>
+            </a:r>
+            <a:r>
+              <a:rPr sz="950" b="1">
+                <a:solidFill>
+                  <a:srgbClr val="262626"/>
+                </a:solidFill>
+                <a:latin typeface="Apple SD Gothic Neo"/>
+                <a:ea typeface="Apple SD Gothic Neo"/>
+              </a:rPr>
+              <a:t>함께 예측되는 이웃</a:t>
+            </a:r>
+            <a:r>
+              <a:rPr sz="950" b="0">
+                <a:solidFill>
+                  <a:srgbClr val="262626"/>
+                </a:solidFill>
+                <a:latin typeface="Apple SD Gothic Neo"/>
+                <a:ea typeface="Apple SD Gothic Neo"/>
+              </a:rPr>
+              <a:t>. 이웃을</a:t>
             </a:r>
           </a:p>
           <a:p>
@@ -3826,7 +3846,7 @@
                 <a:latin typeface="Apple SD Gothic Neo"/>
                 <a:ea typeface="Apple SD Gothic Neo"/>
               </a:rPr>
-              <a:t>  처음 보는 신호(주가·환율)도 관계를 추론해 반영</a:t>
+              <a:t>  참고해 타깃을 더 잘 맞히도록 채점받은 적은 없음</a:t>
             </a:r>
           </a:p>
           <a:p>
@@ -3843,7 +3863,7 @@
                 <a:latin typeface="Apple SD Gothic Neo"/>
                 <a:ea typeface="Apple SD Gothic Neo"/>
               </a:rPr>
-              <a:t>· Moirai(2024.03, ICML): 모든 변량을 한 시퀀스로 함께</a:t>
+              <a:t>· Chronos-2(2025.10): “저 시계열들을 참고해 이 시계열을</a:t>
             </a:r>
           </a:p>
           <a:p>
@@ -3860,7 +3880,27 @@
                 <a:latin typeface="Apple SD Gothic Neo"/>
                 <a:ea typeface="Apple SD Gothic Neo"/>
               </a:rPr>
-              <a:t>  모델링(any-variate) — 공변량 조건화를 별도 과제로</a:t>
+              <a:t>  맞혀라”로 직접 훈련 — 공변량이 처음부터 </a:t>
+            </a:r>
+            <a:r>
+              <a:rPr sz="950" b="1">
+                <a:solidFill>
+                  <a:srgbClr val="262626"/>
+                </a:solidFill>
+                <a:latin typeface="Apple SD Gothic Neo"/>
+                <a:ea typeface="Apple SD Gothic Neo"/>
+              </a:rPr>
+              <a:t>힌트</a:t>
+            </a:r>
+            <a:r>
+              <a:rPr sz="950" b="0">
+                <a:solidFill>
+                  <a:srgbClr val="262626"/>
+                </a:solidFill>
+                <a:latin typeface="Apple SD Gothic Neo"/>
+                <a:ea typeface="Apple SD Gothic Neo"/>
+              </a:rPr>
+              <a:t> 역할.</a:t>
             </a:r>
           </a:p>
           <a:p>
@@ -3877,7 +3917,7 @@
                 <a:latin typeface="Apple SD Gothic Neo"/>
                 <a:ea typeface="Apple SD Gothic Neo"/>
               </a:rPr>
-              <a:t>  학습하지는 않아, 새 신호의 이득 전달이 상대적으로 약함</a:t>
+              <a:t>  그래서 처음 보는 주가·환율도 힌트로 연결해 씀</a:t>
             </a:r>
           </a:p>
           <a:p>
@@ -3894,7 +3934,7 @@
                 <a:latin typeface="Apple SD Gothic Neo"/>
                 <a:ea typeface="Apple SD Gothic Neo"/>
               </a:rPr>
-              <a:t>· 체급도 다름: 본 실험은 small 변형(약 14M) vs C2 120M —</a:t>
+              <a:t>· 체급 차이 병기: small 변형(약 14M) vs C2 120M —</a:t>
             </a:r>
           </a:p>
           <a:p>
@@ -3911,7 +3951,7 @@
                 <a:latin typeface="Apple SD Gothic Neo"/>
                 <a:ea typeface="Apple SD Gothic Neo"/>
               </a:rPr>
-              <a:t>  격차의 일부는 세대(과제 설계), 일부는 체급일 수 있음</a:t>
+              <a:t>  격차의 일부는 훈련 방식, 일부는 체급일 수 있음</a:t>
             </a:r>
           </a:p>
         </p:txBody>

--- a/docs/부품비교_FM동일프로토콜_1p_2026-08-13.pptx
+++ b/docs/부품비교_FM동일프로토콜_1p_2026-08-13.pptx
@@ -3710,7 +3710,7 @@
           <a:p>
             <a:pPr algn="l">
               <a:spcAft>
-                <a:spcPts val="180"/>
+                <a:spcPts val="160"/>
               </a:spcAft>
             </a:pPr>
             <a:r>
@@ -3721,98 +3721,179 @@
                 <a:latin typeface="Apple SD Gothic Neo"/>
                 <a:ea typeface="Apple SD Gothic Neo"/>
               </a:rPr>
-              <a:t>Chronos-2와 Moirai 계열, 무엇이 다른가</a:t>
+              <a:t>무엇이 다른가 — 절제 실험이 답합니다 (힌트 흡수력)</a:t>
             </a:r>
           </a:p>
           <a:p>
             <a:pPr algn="l">
               <a:spcAft>
-                <a:spcPts val="180"/>
+                <a:spcPts val="160"/>
               </a:spcAft>
             </a:pPr>
             <a:r>
-              <a:rPr sz="950" b="0">
+              <a:rPr sz="900" b="0">
                 <a:solidFill>
                   <a:srgbClr val="262626"/>
                 </a:solidFill>
                 <a:latin typeface="Apple SD Gothic Neo"/>
                 <a:ea typeface="Apple SD Gothic Neo"/>
               </a:rPr>
-              <a:t>둘 다 공변량을 입력받습니다. 차이는 사전학습 때 공변량에게</a:t>
+              <a:t>둘 다 공변량을 입력받지만, </a:t>
             </a:r>
           </a:p>
           <a:p>
             <a:pPr algn="l">
               <a:spcAft>
-                <a:spcPts val="180"/>
+                <a:spcPts val="160"/>
               </a:spcAft>
             </a:pPr>
             <a:r>
-              <a:rPr sz="950" b="0">
+              <a:rPr sz="900" b="1">
                 <a:solidFill>
                   <a:srgbClr val="262626"/>
                 </a:solidFill>
                 <a:latin typeface="Apple SD Gothic Neo"/>
                 <a:ea typeface="Apple SD Gothic Neo"/>
               </a:rPr>
-              <a:t>어떤 </a:t>
-            </a:r>
-            <a:r>
-              <a:rPr sz="950" b="1">
+              <a:t>같은 힌트에서 뽑아내는 이득</a:t>
+            </a:r>
+            <a:r>
+              <a:rPr sz="900" b="0">
                 <a:solidFill>
                   <a:srgbClr val="262626"/>
                 </a:solidFill>
                 <a:latin typeface="Apple SD Gothic Neo"/>
                 <a:ea typeface="Apple SD Gothic Neo"/>
               </a:rPr>
-              <a:t>역할</a:t>
-            </a:r>
-            <a:r>
-              <a:rPr sz="950" b="0">
+              <a:t>이 실측으로 다릅니다:</a:t>
+            </a:r>
+          </a:p>
+          <a:p>
+            <a:pPr algn="l">
+              <a:spcAft>
+                <a:spcPts val="160"/>
+              </a:spcAft>
+            </a:pPr>
+            <a:r>
+              <a:rPr sz="900" b="0">
                 <a:solidFill>
                   <a:srgbClr val="262626"/>
                 </a:solidFill>
                 <a:latin typeface="Apple SD Gothic Neo"/>
                 <a:ea typeface="Apple SD Gothic Neo"/>
               </a:rPr>
-              <a:t>을 주고 훈련했는가입니다.</a:t>
-            </a:r>
-          </a:p>
-          <a:p>
-            <a:pPr algn="l">
-              <a:spcAft>
-                <a:spcPts val="180"/>
-              </a:spcAft>
-            </a:pPr>
-            <a:r>
-              <a:rPr sz="950" b="0">
-                <a:solidFill>
-                  <a:srgbClr val="262626"/>
+              <a:t>· 빠른신호(주가·환율)를 얹었을 때 — </a:t>
+            </a:r>
+            <a:r>
+              <a:rPr sz="900" b="1">
+                <a:solidFill>
+                  <a:srgbClr val="008A3E"/>
                 </a:solidFill>
                 <a:latin typeface="Apple SD Gothic Neo"/>
                 <a:ea typeface="Apple SD Gothic Neo"/>
               </a:rPr>
-              <a:t>· Moirai(2024.03): “여러 시계열을 나란히 놓고 전부를 함께</a:t>
-            </a:r>
-          </a:p>
-          <a:p>
-            <a:pPr algn="l">
-              <a:spcAft>
-                <a:spcPts val="180"/>
-              </a:spcAft>
-            </a:pPr>
-            <a:r>
-              <a:rPr sz="950" b="0">
-                <a:solidFill>
-                  <a:srgbClr val="262626"/>
+              <a:t>C2 -3.4%</a:t>
+            </a:r>
+            <a:r>
+              <a:rPr sz="850" b="0">
+                <a:solidFill>
+                  <a:srgbClr val="6B6B6B"/>
                 </a:solidFill>
                 <a:latin typeface="Apple SD Gothic Neo"/>
                 <a:ea typeface="Apple SD Gothic Neo"/>
               </a:rPr>
-              <a:t>  예측하라”로 훈련 — 공변량은 </a:t>
-            </a:r>
-            <a:r>
-              <a:rPr sz="950" b="1">
+              <a:t> (0.836→0.808)</a:t>
+            </a:r>
+          </a:p>
+          <a:p>
+            <a:pPr algn="l">
+              <a:spcAft>
+                <a:spcPts val="160"/>
+              </a:spcAft>
+            </a:pPr>
+            <a:r>
+              <a:rPr sz="900" b="0">
+                <a:solidFill>
+                  <a:srgbClr val="262626"/>
+                </a:solidFill>
+                <a:latin typeface="Apple SD Gothic Neo"/>
+                <a:ea typeface="Apple SD Gothic Neo"/>
+              </a:rPr>
+              <a:t>  vs </a:t>
+            </a:r>
+            <a:r>
+              <a:rPr sz="900" b="1">
+                <a:solidFill>
+                  <a:srgbClr val="B0532F"/>
+                </a:solidFill>
+                <a:latin typeface="Apple SD Gothic Neo"/>
+                <a:ea typeface="Apple SD Gothic Neo"/>
+              </a:rPr>
+              <a:t>Moirai -1.2%</a:t>
+            </a:r>
+            <a:r>
+              <a:rPr sz="900" b="0">
+                <a:solidFill>
+                  <a:srgbClr val="262626"/>
+                </a:solidFill>
+                <a:latin typeface="Apple SD Gothic Neo"/>
+                <a:ea typeface="Apple SD Gothic Neo"/>
+              </a:rPr>
+              <a:t> (0.883→0.873) — 흡수력 약 3배 차이</a:t>
+            </a:r>
+          </a:p>
+          <a:p>
+            <a:pPr algn="l">
+              <a:spcAft>
+                <a:spcPts val="160"/>
+              </a:spcAft>
+            </a:pPr>
+            <a:r>
+              <a:rPr sz="900" b="0">
+                <a:solidFill>
+                  <a:srgbClr val="262626"/>
+                </a:solidFill>
+                <a:latin typeface="Apple SD Gothic Neo"/>
+                <a:ea typeface="Apple SD Gothic Neo"/>
+              </a:rPr>
+              <a:t>· 공식지표 10종은 Moirai에서 무이득 (0.880→0.883 소폭 악화)</a:t>
+            </a:r>
+          </a:p>
+          <a:p>
+            <a:pPr algn="l">
+              <a:spcAft>
+                <a:spcPts val="160"/>
+              </a:spcAft>
+            </a:pPr>
+            <a:r>
+              <a:rPr sz="900" b="0">
+                <a:solidFill>
+                  <a:srgbClr val="262626"/>
+                </a:solidFill>
+                <a:latin typeface="Apple SD Gothic Neo"/>
+                <a:ea typeface="Apple SD Gothic Neo"/>
+              </a:rPr>
+              <a:t>원인은 훈련 문제의 차이입니다:</a:t>
+            </a:r>
+          </a:p>
+          <a:p>
+            <a:pPr algn="l">
+              <a:spcAft>
+                <a:spcPts val="160"/>
+              </a:spcAft>
+            </a:pPr>
+            <a:r>
+              <a:rPr sz="900" b="0">
+                <a:solidFill>
+                  <a:srgbClr val="262626"/>
+                </a:solidFill>
+                <a:latin typeface="Apple SD Gothic Neo"/>
+                <a:ea typeface="Apple SD Gothic Neo"/>
+              </a:rPr>
+              <a:t>· Moirai: “전부를 함께 예측하라” — 공변량 = </a:t>
+            </a:r>
+            <a:r>
+              <a:rPr sz="900" b="1">
                 <a:solidFill>
                   <a:srgbClr val="262626"/>
                 </a:solidFill>
@@ -3822,68 +3903,51 @@
               <a:t>함께 예측되는 이웃</a:t>
             </a:r>
             <a:r>
-              <a:rPr sz="950" b="0">
+              <a:rPr sz="900" b="0">
                 <a:solidFill>
                   <a:srgbClr val="262626"/>
                 </a:solidFill>
                 <a:latin typeface="Apple SD Gothic Neo"/>
                 <a:ea typeface="Apple SD Gothic Neo"/>
               </a:rPr>
-              <a:t>. 이웃을</a:t>
+              <a:t>,</a:t>
             </a:r>
           </a:p>
           <a:p>
             <a:pPr algn="l">
               <a:spcAft>
-                <a:spcPts val="180"/>
+                <a:spcPts val="160"/>
               </a:spcAft>
             </a:pPr>
             <a:r>
-              <a:rPr sz="950" b="0">
+              <a:rPr sz="900" b="0">
                 <a:solidFill>
                   <a:srgbClr val="262626"/>
                 </a:solidFill>
                 <a:latin typeface="Apple SD Gothic Neo"/>
                 <a:ea typeface="Apple SD Gothic Neo"/>
               </a:rPr>
-              <a:t>  참고해 타깃을 더 잘 맞히도록 채점받은 적은 없음</a:t>
+              <a:t>  이웃을 참고해 타깃을 맞히도록 채점받은 적 없음</a:t>
             </a:r>
           </a:p>
           <a:p>
             <a:pPr algn="l">
               <a:spcAft>
-                <a:spcPts val="180"/>
+                <a:spcPts val="160"/>
               </a:spcAft>
             </a:pPr>
             <a:r>
-              <a:rPr sz="950" b="0">
+              <a:rPr sz="900" b="0">
                 <a:solidFill>
                   <a:srgbClr val="262626"/>
                 </a:solidFill>
                 <a:latin typeface="Apple SD Gothic Neo"/>
                 <a:ea typeface="Apple SD Gothic Neo"/>
               </a:rPr>
-              <a:t>· Chronos-2(2025.10): “저 시계열들을 참고해 이 시계열을</a:t>
-            </a:r>
-          </a:p>
-          <a:p>
-            <a:pPr algn="l">
-              <a:spcAft>
-                <a:spcPts val="180"/>
-              </a:spcAft>
-            </a:pPr>
-            <a:r>
-              <a:rPr sz="950" b="0">
-                <a:solidFill>
-                  <a:srgbClr val="262626"/>
-                </a:solidFill>
-                <a:latin typeface="Apple SD Gothic Neo"/>
-                <a:ea typeface="Apple SD Gothic Neo"/>
-              </a:rPr>
-              <a:t>  맞혀라”로 직접 훈련 — 공변량이 처음부터 </a:t>
-            </a:r>
-            <a:r>
-              <a:rPr sz="950" b="1">
+              <a:t>· Chronos-2: “저것을 참고해 이것을 맞혀라” — 공변량 = </a:t>
+            </a:r>
+            <a:r>
+              <a:rPr sz="900" b="1">
                 <a:solidFill>
                   <a:srgbClr val="262626"/>
                 </a:solidFill>
@@ -3893,65 +3957,48 @@
               <a:t>힌트</a:t>
             </a:r>
             <a:r>
-              <a:rPr sz="950" b="0">
+              <a:rPr sz="900" b="0">
                 <a:solidFill>
                   <a:srgbClr val="262626"/>
                 </a:solidFill>
                 <a:latin typeface="Apple SD Gothic Neo"/>
                 <a:ea typeface="Apple SD Gothic Neo"/>
               </a:rPr>
-              <a:t> 역할.</a:t>
+              <a:t>,</a:t>
             </a:r>
           </a:p>
           <a:p>
             <a:pPr algn="l">
               <a:spcAft>
-                <a:spcPts val="180"/>
+                <a:spcPts val="160"/>
               </a:spcAft>
             </a:pPr>
             <a:r>
-              <a:rPr sz="950" b="0">
+              <a:rPr sz="900" b="0">
                 <a:solidFill>
                   <a:srgbClr val="262626"/>
                 </a:solidFill>
                 <a:latin typeface="Apple SD Gothic Neo"/>
                 <a:ea typeface="Apple SD Gothic Neo"/>
               </a:rPr>
-              <a:t>  그래서 처음 보는 주가·환율도 힌트로 연결해 씀</a:t>
+              <a:t>  힌트 활용 실패에 벌점이 집중되도록 훈련됨</a:t>
             </a:r>
           </a:p>
           <a:p>
             <a:pPr algn="l">
               <a:spcAft>
-                <a:spcPts val="180"/>
+                <a:spcPts val="160"/>
               </a:spcAft>
             </a:pPr>
             <a:r>
-              <a:rPr sz="950" b="0">
-                <a:solidFill>
-                  <a:srgbClr val="262626"/>
+              <a:rPr sz="850" b="0">
+                <a:solidFill>
+                  <a:srgbClr val="6B6B6B"/>
                 </a:solidFill>
                 <a:latin typeface="Apple SD Gothic Neo"/>
                 <a:ea typeface="Apple SD Gothic Neo"/>
               </a:rPr>
-              <a:t>· 체급 차이 병기: small 변형(약 14M) vs C2 120M —</a:t>
-            </a:r>
-          </a:p>
-          <a:p>
-            <a:pPr algn="l">
-              <a:spcAft>
-                <a:spcPts val="180"/>
-              </a:spcAft>
-            </a:pPr>
-            <a:r>
-              <a:rPr sz="950" b="0">
-                <a:solidFill>
-                  <a:srgbClr val="262626"/>
-                </a:solidFill>
-                <a:latin typeface="Apple SD Gothic Neo"/>
-                <a:ea typeface="Apple SD Gothic Neo"/>
-              </a:rPr>
-              <a:t>  격차의 일부는 훈련 방식, 일부는 체급일 수 있음</a:t>
+              <a:t>· 체급 차이(small 14M vs 120M)도 격차에 기여 가능</a:t>
             </a:r>
           </a:p>
         </p:txBody>

--- a/docs/부품비교_FM동일프로토콜_1p_2026-08-13.pptx
+++ b/docs/부품비교_FM동일프로토콜_1p_2026-08-13.pptx
@@ -3873,7 +3873,7 @@
                 <a:latin typeface="Apple SD Gothic Neo"/>
                 <a:ea typeface="Apple SD Gothic Neo"/>
               </a:rPr>
-              <a:t>원인은 훈련 문제의 차이입니다:</a:t>
+              <a:t>원인 — 사전학습에서 채점 범위가 다릅니다:</a:t>
             </a:r>
           </a:p>
           <a:p>
@@ -3890,7 +3890,7 @@
                 <a:latin typeface="Apple SD Gothic Neo"/>
                 <a:ea typeface="Apple SD Gothic Neo"/>
               </a:rPr>
-              <a:t>· Moirai: “전부를 함께 예측하라” — 공변량 = </a:t>
+              <a:t>· Moirai:  (공변량₁·₂, 타깃)과거 → </a:t>
             </a:r>
             <a:r>
               <a:rPr sz="900" b="1">
@@ -3900,17 +3900,7 @@
                 <a:latin typeface="Apple SD Gothic Neo"/>
                 <a:ea typeface="Apple SD Gothic Neo"/>
               </a:rPr>
-              <a:t>함께 예측되는 이웃</a:t>
-            </a:r>
-            <a:r>
-              <a:rPr sz="900" b="0">
-                <a:solidFill>
-                  <a:srgbClr val="262626"/>
-                </a:solidFill>
-                <a:latin typeface="Apple SD Gothic Neo"/>
-                <a:ea typeface="Apple SD Gothic Neo"/>
-              </a:rPr>
-              <a:t>,</a:t>
+              <a:t>(공변량₁·₂, 타깃)미래 전부 채점</a:t>
             </a:r>
           </a:p>
           <a:p>
@@ -3927,7 +3917,7 @@
                 <a:latin typeface="Apple SD Gothic Neo"/>
                 <a:ea typeface="Apple SD Gothic Neo"/>
               </a:rPr>
-              <a:t>  이웃을 참고해 타깃을 맞히도록 채점받은 적 없음</a:t>
+              <a:t>  = 공변량도 함께 예측할 대상(이웃). 타깃을 위해 공변량을</a:t>
             </a:r>
           </a:p>
           <a:p>
@@ -3944,27 +3934,7 @@
                 <a:latin typeface="Apple SD Gothic Neo"/>
                 <a:ea typeface="Apple SD Gothic Neo"/>
               </a:rPr>
-              <a:t>· Chronos-2: “저것을 참고해 이것을 맞혀라” — 공변량 = </a:t>
-            </a:r>
-            <a:r>
-              <a:rPr sz="900" b="1">
-                <a:solidFill>
-                  <a:srgbClr val="262626"/>
-                </a:solidFill>
-                <a:latin typeface="Apple SD Gothic Neo"/>
-                <a:ea typeface="Apple SD Gothic Neo"/>
-              </a:rPr>
-              <a:t>힌트</a:t>
-            </a:r>
-            <a:r>
-              <a:rPr sz="900" b="0">
-                <a:solidFill>
-                  <a:srgbClr val="262626"/>
-                </a:solidFill>
-                <a:latin typeface="Apple SD Gothic Neo"/>
-                <a:ea typeface="Apple SD Gothic Neo"/>
-              </a:rPr>
-              <a:t>,</a:t>
+              <a:t>  쓰는 능력은 전체 손실의 일부에만 기여 → 약하게 자람</a:t>
             </a:r>
           </a:p>
           <a:p>
@@ -3981,7 +3951,51 @@
                 <a:latin typeface="Apple SD Gothic Neo"/>
                 <a:ea typeface="Apple SD Gothic Neo"/>
               </a:rPr>
-              <a:t>  힌트 활용 실패에 벌점이 집중되도록 훈련됨</a:t>
+              <a:t>· Chronos-2:  (공변량₁·₂, 타깃)과거 → </a:t>
+            </a:r>
+            <a:r>
+              <a:rPr sz="900" b="1">
+                <a:solidFill>
+                  <a:srgbClr val="262626"/>
+                </a:solidFill>
+                <a:latin typeface="Apple SD Gothic Neo"/>
+                <a:ea typeface="Apple SD Gothic Neo"/>
+              </a:rPr>
+              <a:t>타깃 미래만 채점</a:t>
+            </a:r>
+          </a:p>
+          <a:p>
+            <a:pPr algn="l">
+              <a:spcAft>
+                <a:spcPts val="160"/>
+              </a:spcAft>
+            </a:pPr>
+            <a:r>
+              <a:rPr sz="900" b="0">
+                <a:solidFill>
+                  <a:srgbClr val="262626"/>
+                </a:solidFill>
+                <a:latin typeface="Apple SD Gothic Neo"/>
+                <a:ea typeface="Apple SD Gothic Neo"/>
+              </a:rPr>
+              <a:t>  = 공변량은 힌트. 힌트를 안 보면 손실을 줄일 수 없게</a:t>
+            </a:r>
+          </a:p>
+          <a:p>
+            <a:pPr algn="l">
+              <a:spcAft>
+                <a:spcPts val="160"/>
+              </a:spcAft>
+            </a:pPr>
+            <a:r>
+              <a:rPr sz="900" b="0">
+                <a:solidFill>
+                  <a:srgbClr val="262626"/>
+                </a:solidFill>
+                <a:latin typeface="Apple SD Gothic Neo"/>
+                <a:ea typeface="Apple SD Gothic Neo"/>
+              </a:rPr>
+              <a:t>  의존관계가 설계된 사례(합성 포함)로 훈련</a:t>
             </a:r>
           </a:p>
           <a:p>

--- a/docs/부품비교_FM동일프로토콜_1p_2026-08-13.pptx
+++ b/docs/부품비교_FM동일프로토콜_1p_2026-08-13.pptx
@@ -3123,7 +3123,7 @@
                 <a:latin typeface="Apple SD Gothic Neo"/>
                 <a:ea typeface="Apple SD Gothic Neo"/>
               </a:rPr>
-              <a:t>부품 교체 실험 (개정판 — 완전 동일 프로토콜)  |  네이버클라우드 AX Forward Lab · 2026. 8.</a:t>
+              <a:t>부품 교체 실험 — BISTRO 원본 실측판 (완전 동일 프로토콜)  |  네이버클라우드 AX Forward Lab · 2026. 8.</a:t>
             </a:r>
           </a:p>
         </p:txBody>
@@ -3163,7 +3163,7 @@
                 <a:latin typeface="Apple SD Gothic Neo"/>
                 <a:ea typeface="Apple SD Gothic Neo"/>
               </a:rPr>
-              <a:t>같은 사전학습 FM끼리도 갈립니다 — 조기 슬롯 자격을 통과한 부품은 Chronos-2f뿐</a:t>
+              <a:t>BISTRO 원본을 직접 실측했습니다 — 조기 슬롯 자격을 통과한 부품은 여전히 Chronos-2f뿐</a:t>
             </a:r>
           </a:p>
         </p:txBody>
@@ -3275,7 +3275,27 @@
                 <a:latin typeface="Apple SD Gothic Neo"/>
                 <a:ea typeface="Apple SD Gothic Neo"/>
               </a:rPr>
-              <a:t>FM 부품 = Chronos-2f(zero-shot) vs Moirai-small(zero-shot — BISTRO의 기반 모델 계열, 공개 체크포인트 프록시) · 참고 = 직접학습 LSTM · LLM ICL 암은 오염 문제로 채점 불성립(제외).</a:t>
+              <a:t>FM 부품 = Chronos-2f(120M, zero-shot) vs </a:t>
+            </a:r>
+            <a:r>
+              <a:rPr sz="950" b="1">
+                <a:solidFill>
+                  <a:srgbClr val="6B6B6B"/>
+                </a:solidFill>
+                <a:latin typeface="Apple SD Gothic Neo"/>
+                <a:ea typeface="Apple SD Gothic Neo"/>
+              </a:rPr>
+              <a:t>BISTRO 원본</a:t>
+            </a:r>
+            <a:r>
+              <a:rPr sz="950" b="0">
+                <a:solidFill>
+                  <a:srgbClr val="6B6B6B"/>
+                </a:solidFill>
+                <a:latin typeface="Apple SD Gothic Neo"/>
+                <a:ea typeface="Apple SD Gothic Neo"/>
+              </a:rPr>
+              <a:t>(BIS WP 1337 공개 체크포인트 — Moirai-base 91M을 BIS 거시 4,925계열로 미세조정, zero-shot) · 참고 = 직접학습 LSTM · LLM ICL 암은 오염 문제로 채점 불성립(제외).</a:t>
             </a:r>
           </a:p>
         </p:txBody>
@@ -3339,7 +3359,7 @@
                 <a:latin typeface="Apple SD Gothic Neo"/>
                 <a:ea typeface="Apple SD Gothic Neo"/>
               </a:rPr>
-              <a:t>이번 개정에서 바로잡은 것 — 프로토콜이 점수를 지배합니다</a:t>
+              <a:t>이번 판의 핵심 — 프록시가 아니라 BISTRO 원본입니다</a:t>
             </a:r>
           </a:p>
         </p:txBody>
@@ -3414,17 +3434,17 @@
                 <a:latin typeface="Apple SD Gothic Neo"/>
                 <a:ea typeface="Apple SD Gothic Neo"/>
               </a:rPr>
-              <a:t>· 종전 Moirai 1.453은 구세대 프로토콜(분기 flash 단변량 외삽)의 수치 — 동일 프로토콜로 재실행하니 </a:t>
+              <a:t>· BISTRO 가중치를 BIS 공개 레포(bis-med-it/bistro, Apache 2.0)에서 확보해 직접 실측 — 단독 </a:t>
             </a:r>
             <a:r>
               <a:rPr sz="930" b="1">
                 <a:solidFill>
-                  <a:srgbClr val="008A3E"/>
+                  <a:srgbClr val="262626"/>
                 </a:solidFill>
                 <a:latin typeface="Apple SD Gothic Neo"/>
                 <a:ea typeface="Apple SD Gothic Neo"/>
               </a:rPr>
-              <a:t>0.873 (-40%)</a:t>
+              <a:t>0.871</a:t>
             </a:r>
             <a:r>
               <a:rPr sz="930" b="0">
@@ -3434,7 +3454,7 @@
                 <a:latin typeface="Apple SD Gothic Neo"/>
                 <a:ea typeface="Apple SD Gothic Neo"/>
               </a:rPr>
-              <a:t>. 프로토콜 정정 전 비교는 무효.</a:t>
+              <a:t> (기반 Moirai-small 0.873과 동급, Chronos-2f 0.808에 미달).</a:t>
             </a:r>
           </a:p>
           <a:p>
@@ -3451,7 +3471,7 @@
                 <a:latin typeface="Apple SD Gothic Neo"/>
                 <a:ea typeface="Apple SD Gothic Neo"/>
               </a:rPr>
-              <a:t>· 직접학습 LSTM도 동일 입력(빠른신호 포함)으로 재실행: 1.268 → 1.019로 개선되나 여전히 격차 —</a:t>
+              <a:t>· 거시 미세조정의 효과는 소폭(조기 구간 1.021→1.005) — 미세조정으로도 아래의 구조 차이는 바뀌지 않았습니다.</a:t>
             </a:r>
           </a:p>
           <a:p>
@@ -3468,7 +3488,7 @@
                 <a:latin typeface="Apple SD Gothic Neo"/>
                 <a:ea typeface="Apple SD Gothic Neo"/>
               </a:rPr>
-              <a:t>  입력을 똑같이 줘도 소표본 직접학습의 한계는 남습니다 (조기 구간 1.286).</a:t>
+              <a:t>· 참고: 직접학습 LSTM은 동일 입력에도 1.019 (조기 1.286) — 소표본 직접학습 한계 별도 확인.</a:t>
             </a:r>
           </a:p>
         </p:txBody>
@@ -3586,7 +3606,7 @@
                 <a:latin typeface="Apple SD Gothic Neo"/>
                 <a:ea typeface="Apple SD Gothic Neo"/>
               </a:rPr>
-              <a:t>— Chronos-2f 0.924 ≈ GBM 0.924 (통과) / Moirai 1.021 ·</a:t>
+              <a:t>— Chronos-2f 0.924 ≈ GBM 0.924 (통과) / BISTRO 1.005 ·</a:t>
             </a:r>
           </a:p>
           <a:p>
@@ -3603,7 +3623,7 @@
                 <a:latin typeface="Apple SD Gothic Neo"/>
                 <a:ea typeface="Apple SD Gothic Neo"/>
               </a:rPr>
-              <a:t>LSTM 1.286 (미달). 슬롯 결과가 그대로 따라오며, 두 FM을</a:t>
+              <a:t>LSTM 1.286 (미달). 슬롯 결과: C2f 0.740(개선) / BISTRO</a:t>
             </a:r>
           </a:p>
           <a:p>
@@ -3620,7 +3640,7 @@
                 <a:latin typeface="Apple SD Gothic Neo"/>
                 <a:ea typeface="Apple SD Gothic Neo"/>
               </a:rPr>
-              <a:t>함께 넣어도(듀오 0.745) C2f 단독 슬롯(0.740)을 못 넘습니다</a:t>
+              <a:t>0.750(기준선과 동률 — 효과 없음) / 듀오 0.744 — C2f 단독을</a:t>
             </a:r>
           </a:p>
           <a:p>
@@ -3637,7 +3657,7 @@
                 <a:latin typeface="Apple SD Gothic Neo"/>
                 <a:ea typeface="Apple SD Gothic Neo"/>
               </a:rPr>
-              <a:t>(오차 상관 0.926 — 정보 중복).</a:t>
+              <a:t>못 넘습니다 (오차 상관 0.926 — 정보 중복).</a:t>
             </a:r>
           </a:p>
         </p:txBody>
@@ -3710,7 +3730,7 @@
           <a:p>
             <a:pPr algn="l">
               <a:spcAft>
-                <a:spcPts val="160"/>
+                <a:spcPts val="150"/>
               </a:spcAft>
             </a:pPr>
             <a:r>
@@ -3727,7 +3747,7 @@
           <a:p>
             <a:pPr algn="l">
               <a:spcAft>
-                <a:spcPts val="160"/>
+                <a:spcPts val="150"/>
               </a:spcAft>
             </a:pPr>
             <a:r>
@@ -3744,7 +3764,7 @@
           <a:p>
             <a:pPr algn="l">
               <a:spcAft>
-                <a:spcPts val="160"/>
+                <a:spcPts val="150"/>
               </a:spcAft>
             </a:pPr>
             <a:r>
@@ -3771,7 +3791,7 @@
           <a:p>
             <a:pPr algn="l">
               <a:spcAft>
-                <a:spcPts val="160"/>
+                <a:spcPts val="150"/>
               </a:spcAft>
             </a:pPr>
             <a:r>
@@ -3808,7 +3828,7 @@
           <a:p>
             <a:pPr algn="l">
               <a:spcAft>
-                <a:spcPts val="160"/>
+                <a:spcPts val="150"/>
               </a:spcAft>
             </a:pPr>
             <a:r>
@@ -3829,7 +3849,7 @@
                 <a:latin typeface="Apple SD Gothic Neo"/>
                 <a:ea typeface="Apple SD Gothic Neo"/>
               </a:rPr>
-              <a:t>Moirai -1.2%</a:t>
+              <a:t>BISTRO 무이득</a:t>
             </a:r>
             <a:r>
               <a:rPr sz="900" b="0">
@@ -3839,13 +3859,13 @@
                 <a:latin typeface="Apple SD Gothic Neo"/>
                 <a:ea typeface="Apple SD Gothic Neo"/>
               </a:rPr>
-              <a:t> (0.883→0.873) — 흡수력 약 3배 차이</a:t>
+              <a:t> (0.870→0.871, +0.1%)</a:t>
             </a:r>
           </a:p>
           <a:p>
             <a:pPr algn="l">
               <a:spcAft>
-                <a:spcPts val="160"/>
+                <a:spcPts val="150"/>
               </a:spcAft>
             </a:pPr>
             <a:r>
@@ -3856,13 +3876,13 @@
                 <a:latin typeface="Apple SD Gothic Neo"/>
                 <a:ea typeface="Apple SD Gothic Neo"/>
               </a:rPr>
-              <a:t>· 공식지표 10종은 Moirai에서 무이득 (0.880→0.883 소폭 악화)</a:t>
+              <a:t>· 공식지표 10종: BISTRO -0.5% (0.875→0.870) — 미미</a:t>
             </a:r>
           </a:p>
           <a:p>
             <a:pPr algn="l">
               <a:spcAft>
-                <a:spcPts val="160"/>
+                <a:spcPts val="150"/>
               </a:spcAft>
             </a:pPr>
             <a:r>
@@ -3879,7 +3899,7 @@
           <a:p>
             <a:pPr algn="l">
               <a:spcAft>
-                <a:spcPts val="160"/>
+                <a:spcPts val="150"/>
               </a:spcAft>
             </a:pPr>
             <a:r>
@@ -3890,7 +3910,7 @@
                 <a:latin typeface="Apple SD Gothic Neo"/>
                 <a:ea typeface="Apple SD Gothic Neo"/>
               </a:rPr>
-              <a:t>· Moirai:  (공변량₁·₂, 타깃)과거 → </a:t>
+              <a:t>· Moirai/BISTRO:  (공변량₁·₂, 타깃)과거 → </a:t>
             </a:r>
             <a:r>
               <a:rPr sz="900" b="1">
@@ -3906,7 +3926,7 @@
           <a:p>
             <a:pPr algn="l">
               <a:spcAft>
-                <a:spcPts val="160"/>
+                <a:spcPts val="150"/>
               </a:spcAft>
             </a:pPr>
             <a:r>
@@ -3917,13 +3937,13 @@
                 <a:latin typeface="Apple SD Gothic Neo"/>
                 <a:ea typeface="Apple SD Gothic Neo"/>
               </a:rPr>
-              <a:t>  = 공변량도 함께 예측할 대상(이웃). 타깃을 위해 공변량을</a:t>
+              <a:t>  = 공변량도 함께 예측할 대상(이웃). 거시 미세조정으로도</a:t>
             </a:r>
           </a:p>
           <a:p>
             <a:pPr algn="l">
               <a:spcAft>
-                <a:spcPts val="160"/>
+                <a:spcPts val="150"/>
               </a:spcAft>
             </a:pPr>
             <a:r>
@@ -3934,13 +3954,13 @@
                 <a:latin typeface="Apple SD Gothic Neo"/>
                 <a:ea typeface="Apple SD Gothic Neo"/>
               </a:rPr>
-              <a:t>  쓰는 능력은 전체 손실의 일부에만 기여 → 약하게 자람</a:t>
+              <a:t>  이 채점 구조는 그대로 → 힌트 활용 회로가 약하게 유지</a:t>
             </a:r>
           </a:p>
           <a:p>
             <a:pPr algn="l">
               <a:spcAft>
-                <a:spcPts val="160"/>
+                <a:spcPts val="150"/>
               </a:spcAft>
             </a:pPr>
             <a:r>
@@ -3967,7 +3987,7 @@
           <a:p>
             <a:pPr algn="l">
               <a:spcAft>
-                <a:spcPts val="160"/>
+                <a:spcPts val="150"/>
               </a:spcAft>
             </a:pPr>
             <a:r>
@@ -3978,13 +3998,13 @@
                 <a:latin typeface="Apple SD Gothic Neo"/>
                 <a:ea typeface="Apple SD Gothic Neo"/>
               </a:rPr>
-              <a:t>  = 공변량은 힌트. 힌트를 안 보면 손실을 줄일 수 없게</a:t>
+              <a:t>  = 공변량은 힌트 — 힌트를 안 보면 손실을 줄일 수 없게</a:t>
             </a:r>
           </a:p>
           <a:p>
             <a:pPr algn="l">
               <a:spcAft>
-                <a:spcPts val="160"/>
+                <a:spcPts val="150"/>
               </a:spcAft>
             </a:pPr>
             <a:r>
@@ -4001,7 +4021,7 @@
           <a:p>
             <a:pPr algn="l">
               <a:spcAft>
-                <a:spcPts val="160"/>
+                <a:spcPts val="150"/>
               </a:spcAft>
             </a:pPr>
             <a:r>
@@ -4012,7 +4032,7 @@
                 <a:latin typeface="Apple SD Gothic Neo"/>
                 <a:ea typeface="Apple SD Gothic Neo"/>
               </a:rPr>
-              <a:t>· 체급 차이(small 14M vs 120M)도 격차에 기여 가능</a:t>
+              <a:t>· 체급은 비슷(91M vs 120M) — 격차 원인은 체급이 아니라 훈련 방식</a:t>
             </a:r>
           </a:p>
         </p:txBody>
@@ -4140,27 +4160,7 @@
                 <a:latin typeface="Apple SD Gothic Neo"/>
                 <a:ea typeface="Apple SD Gothic Neo"/>
               </a:rPr>
-              <a:t>유의: 본 실험의 Moirai는 공개 체크포인트 zero-shot </a:t>
-            </a:r>
-            <a:r>
-              <a:rPr sz="850" b="1">
-                <a:solidFill>
-                  <a:srgbClr val="6B6B6B"/>
-                </a:solidFill>
-                <a:latin typeface="Apple SD Gothic Neo"/>
-                <a:ea typeface="Apple SD Gothic Neo"/>
-              </a:rPr>
-              <a:t>프록시</a:t>
-            </a:r>
-            <a:r>
-              <a:rPr sz="850" b="0">
-                <a:solidFill>
-                  <a:srgbClr val="6B6B6B"/>
-                </a:solidFill>
-                <a:latin typeface="Apple SD Gothic Neo"/>
-                <a:ea typeface="Apple SD Gothic Neo"/>
-              </a:rPr>
-              <a:t>입니다. BISTRO</a:t>
+              <a:t>유의: BISTRO = BIS WP 1337 (Koyuncu·Kwon·Lombardi·Perez-Cruz·Shin)의</a:t>
             </a:r>
           </a:p>
           <a:p>
@@ -4177,7 +4177,7 @@
                 <a:latin typeface="Apple SD Gothic Neo"/>
                 <a:ea typeface="Apple SD Gothic Neo"/>
               </a:rPr>
-              <a:t>원본(개량·미세조정 반영 가능)에 대한 판정이 아니며, 원본을 동일 규약으로</a:t>
+              <a:t>공개 원본 체크포인트를 논문 표준 사용법(zero-shot)으로 적용한 실측입니다.</a:t>
             </a:r>
           </a:p>
           <a:p>
@@ -4194,7 +4194,7 @@
                 <a:latin typeface="Apple SD Gothic Neo"/>
                 <a:ea typeface="Apple SD Gothic Neo"/>
               </a:rPr>
-              <a:t>채점하면 직접 비교가 가능합니다. LLM ICL 암은 오염으로 채점 불성립(제외).</a:t>
+              <a:t>한국 GDP 과제용 추가 미세조정은 미실시. LLM ICL 암은 오염으로 제외.</a:t>
             </a:r>
           </a:p>
         </p:txBody>

--- a/docs/부품비교_FM동일프로토콜_1p_2026-08-13.pptx
+++ b/docs/부품비교_FM동일프로토콜_1p_2026-08-13.pptx
@@ -3123,7 +3123,7 @@
                 <a:latin typeface="Apple SD Gothic Neo"/>
                 <a:ea typeface="Apple SD Gothic Neo"/>
               </a:rPr>
-              <a:t>부품 교체 실험 — BISTRO 원본 실측판 (완전 동일 프로토콜)  |  네이버클라우드 AX Forward Lab · 2026. 8.</a:t>
+              <a:t>부품 교체 실험  |  네이버클라우드 AX Forward Lab · 2026. 8.</a:t>
             </a:r>
           </a:p>
         </p:txBody>
@@ -3163,7 +3163,7 @@
                 <a:latin typeface="Apple SD Gothic Neo"/>
                 <a:ea typeface="Apple SD Gothic Neo"/>
               </a:rPr>
-              <a:t>BISTRO 원본을 직접 실측했습니다 — 조기 슬롯 자격을 통과한 부품은 여전히 Chronos-2f뿐</a:t>
+              <a:t>부품으로서의 시계열 FM(ICL) 비교 — 조기 슬롯 자격은 Chronos-2만 충족</a:t>
             </a:r>
           </a:p>
         </p:txBody>
@@ -3231,34 +3231,24 @@
               </a:spcAft>
             </a:pPr>
             <a:r>
-              <a:rPr sz="1050" b="0">
-                <a:solidFill>
-                  <a:srgbClr val="262626"/>
+              <a:rPr sz="1050" b="1">
+                <a:solidFill>
+                  <a:srgbClr val="243447"/>
                 </a:solidFill>
                 <a:latin typeface="Apple SD Gothic Neo"/>
                 <a:ea typeface="Apple SD Gothic Neo"/>
               </a:rPr>
-              <a:t>실험 설계: BISTRO 프레임워크의 세 암(Task-Specific 소형 모델 · Foundation Model · LLM ICL) 중 채점 가능한 부품들을 </a:t>
-            </a:r>
-            <a:r>
-              <a:rPr sz="1050" b="1">
+              <a:t>실험 설계  </a:t>
+            </a:r>
+            <a:r>
+              <a:rPr sz="1050" b="0">
                 <a:solidFill>
                   <a:srgbClr val="262626"/>
                 </a:solidFill>
                 <a:latin typeface="Apple SD Gothic Neo"/>
                 <a:ea typeface="Apple SD Gothic Neo"/>
               </a:rPr>
-              <a:t>전부 동일 프로토콜</a:t>
-            </a:r>
-            <a:r>
-              <a:rPr sz="1050" b="0">
-                <a:solidFill>
-                  <a:srgbClr val="262626"/>
-                </a:solidFill>
-                <a:latin typeface="Apple SD Gothic Neo"/>
-                <a:ea typeface="Apple SD Gothic Neo"/>
-              </a:rPr>
-              <a:t>(DFM 스냅샷 + 공변량 10종 + 빠른신호 4종, 분기말 N_gdp 외삽, 32분기 실시간 그리드)로 실행하고, 검증된 주차별 결합의 조기 슬롯에 교체 장착.</a:t>
+              <a:t>검증된 주차별 결합의 조기 슬롯에 시계열 FM을 부품으로 장착해 비교. 두 모델 모두 파라미터 갱신 없이 과거 데이터를 문맥으로 사용(ICL·zero-shot)하며, 입력·과제·평가 완전 동일 — DFM 스냅샷 + 공변량 10종 + 빠른신호 4종, 분기말 N_gdp 외삽, 32분기 실시간 그리드.</a:t>
             </a:r>
           </a:p>
           <a:p>
@@ -3268,34 +3258,24 @@
               </a:spcAft>
             </a:pPr>
             <a:r>
-              <a:rPr sz="950" b="0">
-                <a:solidFill>
-                  <a:srgbClr val="6B6B6B"/>
+              <a:rPr sz="950" b="1">
+                <a:solidFill>
+                  <a:srgbClr val="243447"/>
                 </a:solidFill>
                 <a:latin typeface="Apple SD Gothic Neo"/>
                 <a:ea typeface="Apple SD Gothic Neo"/>
               </a:rPr>
-              <a:t>FM 부품 = Chronos-2f(120M, zero-shot) vs </a:t>
-            </a:r>
-            <a:r>
-              <a:rPr sz="950" b="1">
+              <a:t>비교 대상  </a:t>
+            </a:r>
+            <a:r>
+              <a:rPr sz="950" b="0">
                 <a:solidFill>
                   <a:srgbClr val="6B6B6B"/>
                 </a:solidFill>
                 <a:latin typeface="Apple SD Gothic Neo"/>
                 <a:ea typeface="Apple SD Gothic Neo"/>
               </a:rPr>
-              <a:t>BISTRO 원본</a:t>
-            </a:r>
-            <a:r>
-              <a:rPr sz="950" b="0">
-                <a:solidFill>
-                  <a:srgbClr val="6B6B6B"/>
-                </a:solidFill>
-                <a:latin typeface="Apple SD Gothic Neo"/>
-                <a:ea typeface="Apple SD Gothic Neo"/>
-              </a:rPr>
-              <a:t>(BIS WP 1337 공개 체크포인트 — Moirai-base 91M을 BIS 거시 4,925계열로 미세조정, zero-shot) · 참고 = 직접학습 LSTM · LLM ICL 암은 오염 문제로 채점 불성립(제외).</a:t>
+              <a:t>Chronos-2(아마존, 120M) vs BISTRO(BIS WP 1337, Moirai-base 91M을 BIS 거시 4,925계열로 미세조정 — 공개 체크포인트) · 참고: 직접학습 LSTM · LLM 기반 ICL(HCX 등)은 학습데이터 오염으로 채점 제외.</a:t>
             </a:r>
           </a:p>
         </p:txBody>
@@ -3359,7 +3339,7 @@
                 <a:latin typeface="Apple SD Gothic Neo"/>
                 <a:ea typeface="Apple SD Gothic Neo"/>
               </a:rPr>
-              <a:t>이번 판의 핵심 — 프록시가 아니라 BISTRO 원본입니다</a:t>
+              <a:t>결과 요약</a:t>
             </a:r>
           </a:p>
         </p:txBody>
@@ -3434,27 +3414,7 @@
                 <a:latin typeface="Apple SD Gothic Neo"/>
                 <a:ea typeface="Apple SD Gothic Neo"/>
               </a:rPr>
-              <a:t>· BISTRO 가중치를 BIS 공개 레포(bis-med-it/bistro, Apache 2.0)에서 확보해 직접 실측 — 단독 </a:t>
-            </a:r>
-            <a:r>
-              <a:rPr sz="930" b="1">
-                <a:solidFill>
-                  <a:srgbClr val="262626"/>
-                </a:solidFill>
-                <a:latin typeface="Apple SD Gothic Neo"/>
-                <a:ea typeface="Apple SD Gothic Neo"/>
-              </a:rPr>
-              <a:t>0.871</a:t>
-            </a:r>
-            <a:r>
-              <a:rPr sz="930" b="0">
-                <a:solidFill>
-                  <a:srgbClr val="262626"/>
-                </a:solidFill>
-                <a:latin typeface="Apple SD Gothic Neo"/>
-                <a:ea typeface="Apple SD Gothic Neo"/>
-              </a:rPr>
-              <a:t> (기반 Moirai-small 0.873과 동급, Chronos-2f 0.808에 미달).</a:t>
+              <a:t>· 단독 성능: Chronos-2f 0.808 &lt; BISTRO 0.871 ≈ 기반 Moirai-small 0.873 — BIS 거시 미세조정의 효과는 소폭(조기 구간 1.021→1.005)</a:t>
             </a:r>
           </a:p>
           <a:p>
@@ -3471,7 +3431,7 @@
                 <a:latin typeface="Apple SD Gothic Neo"/>
                 <a:ea typeface="Apple SD Gothic Neo"/>
               </a:rPr>
-              <a:t>· 거시 미세조정의 효과는 소폭(조기 구간 1.021→1.005) — 미세조정으로도 아래의 구조 차이는 바뀌지 않았습니다.</a:t>
+              <a:t>· 슬롯 장착: Chronos-2f만 개선(0.750→0.740). BISTRO는 동률(0.750), 두 FM 병용(0.744)도 C2f 단독에 미달</a:t>
             </a:r>
           </a:p>
           <a:p>
@@ -3488,7 +3448,7 @@
                 <a:latin typeface="Apple SD Gothic Neo"/>
                 <a:ea typeface="Apple SD Gothic Neo"/>
               </a:rPr>
-              <a:t>· 참고: 직접학습 LSTM은 동일 입력에도 1.019 (조기 1.286) — 소표본 직접학습 한계 별도 확인.</a:t>
+              <a:t>· 참고: 직접학습 LSTM은 동일 입력에도 1.019(조기 1.286) — 소표본 직접학습 한계 재확인</a:t>
             </a:r>
           </a:p>
         </p:txBody>
@@ -3572,7 +3532,7 @@
                 <a:latin typeface="Apple SD Gothic Neo"/>
                 <a:ea typeface="Apple SD Gothic Neo"/>
               </a:rPr>
-              <a:t>슬롯 자격 요건은 여전히 하나입니다</a:t>
+              <a:t>슬롯 자격 — 조기 구간에서 GBM과 대등할 것</a:t>
             </a:r>
           </a:p>
           <a:p>
@@ -3589,7 +3549,7 @@
                 <a:latin typeface="Apple SD Gothic Neo"/>
                 <a:ea typeface="Apple SD Gothic Neo"/>
               </a:rPr>
-              <a:t>“조기 구간(지표 공백기)에서 GBM과 대등한 단독 성능”</a:t>
+              <a:t>· 조기 구간(지표 공백기) 단독: Chronos-2f 0.924 ≈ GBM</a:t>
             </a:r>
           </a:p>
           <a:p>
@@ -3606,7 +3566,7 @@
                 <a:latin typeface="Apple SD Gothic Neo"/>
                 <a:ea typeface="Apple SD Gothic Neo"/>
               </a:rPr>
-              <a:t>— Chronos-2f 0.924 ≈ GBM 0.924 (통과) / BISTRO 1.005 ·</a:t>
+              <a:t>  0.924 (충족) / BISTRO 1.005 · LSTM 1.286 (미충족)</a:t>
             </a:r>
           </a:p>
           <a:p>
@@ -3623,7 +3583,7 @@
                 <a:latin typeface="Apple SD Gothic Neo"/>
                 <a:ea typeface="Apple SD Gothic Neo"/>
               </a:rPr>
-              <a:t>LSTM 1.286 (미달). 슬롯 결과: C2f 0.740(개선) / BISTRO</a:t>
+              <a:t>· 슬롯 결과가 자격 판정과 일치: C2f 0.740(개선) /</a:t>
             </a:r>
           </a:p>
           <a:p>
@@ -3640,7 +3600,7 @@
                 <a:latin typeface="Apple SD Gothic Neo"/>
                 <a:ea typeface="Apple SD Gothic Neo"/>
               </a:rPr>
-              <a:t>0.750(기준선과 동률 — 효과 없음) / 듀오 0.744 — C2f 단독을</a:t>
+              <a:t>  BISTRO 0.750(동률) / 병용 0.744 — C2f 단독 미달</a:t>
             </a:r>
           </a:p>
           <a:p>
@@ -3650,14 +3610,14 @@
               </a:spcAft>
             </a:pPr>
             <a:r>
-              <a:rPr sz="950" b="0">
-                <a:solidFill>
-                  <a:srgbClr val="262626"/>
+              <a:rPr sz="900" b="0">
+                <a:solidFill>
+                  <a:srgbClr val="6B6B6B"/>
                 </a:solidFill>
                 <a:latin typeface="Apple SD Gothic Neo"/>
                 <a:ea typeface="Apple SD Gothic Neo"/>
               </a:rPr>
-              <a:t>못 넘습니다 (오차 상관 0.926 — 정보 중복).</a:t>
+              <a:t>  (조기 오차 상관 0.926, 정보 중복)</a:t>
             </a:r>
           </a:p>
         </p:txBody>
@@ -3671,7 +3631,7 @@
         <p:spPr>
           <a:xfrm>
             <a:off x="7452360" y="3474720"/>
-            <a:ext cx="41148" cy="2286000"/>
+            <a:ext cx="41148" cy="2240280"/>
           </a:xfrm>
           <a:prstGeom prst="rect">
             <a:avLst/>
@@ -3715,7 +3675,7 @@
         <p:spPr>
           <a:xfrm>
             <a:off x="7635240" y="3474720"/>
-            <a:ext cx="4023359" cy="2331720"/>
+            <a:ext cx="4023359" cy="2286000"/>
           </a:xfrm>
           <a:prstGeom prst="rect">
             <a:avLst/>
@@ -3730,7 +3690,7 @@
           <a:p>
             <a:pPr algn="l">
               <a:spcAft>
-                <a:spcPts val="150"/>
+                <a:spcPts val="160"/>
               </a:spcAft>
             </a:pPr>
             <a:r>
@@ -3741,13 +3701,13 @@
                 <a:latin typeface="Apple SD Gothic Neo"/>
                 <a:ea typeface="Apple SD Gothic Neo"/>
               </a:rPr>
-              <a:t>무엇이 다른가 — 절제 실험이 답합니다 (힌트 흡수력)</a:t>
+              <a:t>성능 차이의 원인 — 공변량 절제 실험</a:t>
             </a:r>
           </a:p>
           <a:p>
             <a:pPr algn="l">
               <a:spcAft>
-                <a:spcPts val="150"/>
+                <a:spcPts val="160"/>
               </a:spcAft>
             </a:pPr>
             <a:r>
@@ -3758,51 +3718,7 @@
                 <a:latin typeface="Apple SD Gothic Neo"/>
                 <a:ea typeface="Apple SD Gothic Neo"/>
               </a:rPr>
-              <a:t>둘 다 공변량을 입력받지만, </a:t>
-            </a:r>
-          </a:p>
-          <a:p>
-            <a:pPr algn="l">
-              <a:spcAft>
-                <a:spcPts val="150"/>
-              </a:spcAft>
-            </a:pPr>
-            <a:r>
-              <a:rPr sz="900" b="1">
-                <a:solidFill>
-                  <a:srgbClr val="262626"/>
-                </a:solidFill>
-                <a:latin typeface="Apple SD Gothic Neo"/>
-                <a:ea typeface="Apple SD Gothic Neo"/>
-              </a:rPr>
-              <a:t>같은 힌트에서 뽑아내는 이득</a:t>
-            </a:r>
-            <a:r>
-              <a:rPr sz="900" b="0">
-                <a:solidFill>
-                  <a:srgbClr val="262626"/>
-                </a:solidFill>
-                <a:latin typeface="Apple SD Gothic Neo"/>
-                <a:ea typeface="Apple SD Gothic Neo"/>
-              </a:rPr>
-              <a:t>이 실측으로 다릅니다:</a:t>
-            </a:r>
-          </a:p>
-          <a:p>
-            <a:pPr algn="l">
-              <a:spcAft>
-                <a:spcPts val="150"/>
-              </a:spcAft>
-            </a:pPr>
-            <a:r>
-              <a:rPr sz="900" b="0">
-                <a:solidFill>
-                  <a:srgbClr val="262626"/>
-                </a:solidFill>
-                <a:latin typeface="Apple SD Gothic Neo"/>
-                <a:ea typeface="Apple SD Gothic Neo"/>
-              </a:rPr>
-              <a:t>· 빠른신호(주가·환율)를 얹었을 때 — </a:t>
+              <a:t>· 같은 빠른신호(주가·환율) 추가 시: </a:t>
             </a:r>
             <a:r>
               <a:rPr sz="900" b="1">
@@ -3828,7 +3744,7 @@
           <a:p>
             <a:pPr algn="l">
               <a:spcAft>
-                <a:spcPts val="150"/>
+                <a:spcPts val="160"/>
               </a:spcAft>
             </a:pPr>
             <a:r>
@@ -3849,23 +3765,23 @@
                 <a:latin typeface="Apple SD Gothic Neo"/>
                 <a:ea typeface="Apple SD Gothic Neo"/>
               </a:rPr>
-              <a:t>BISTRO 무이득</a:t>
-            </a:r>
-            <a:r>
-              <a:rPr sz="900" b="0">
-                <a:solidFill>
-                  <a:srgbClr val="262626"/>
+              <a:t>BISTRO +0.1% 무이득</a:t>
+            </a:r>
+            <a:r>
+              <a:rPr sz="850" b="0">
+                <a:solidFill>
+                  <a:srgbClr val="6B6B6B"/>
                 </a:solidFill>
                 <a:latin typeface="Apple SD Gothic Neo"/>
                 <a:ea typeface="Apple SD Gothic Neo"/>
               </a:rPr>
-              <a:t> (0.870→0.871, +0.1%)</a:t>
+              <a:t> (0.870→0.871)</a:t>
             </a:r>
           </a:p>
           <a:p>
             <a:pPr algn="l">
               <a:spcAft>
-                <a:spcPts val="150"/>
+                <a:spcPts val="160"/>
               </a:spcAft>
             </a:pPr>
             <a:r>
@@ -3876,13 +3792,13 @@
                 <a:latin typeface="Apple SD Gothic Neo"/>
                 <a:ea typeface="Apple SD Gothic Neo"/>
               </a:rPr>
-              <a:t>· 공식지표 10종: BISTRO -0.5% (0.875→0.870) — 미미</a:t>
+              <a:t>· 공식지표 10종 추가: BISTRO -0.5% (0.875→0.870) — 미미</a:t>
             </a:r>
           </a:p>
           <a:p>
             <a:pPr algn="l">
               <a:spcAft>
-                <a:spcPts val="150"/>
+                <a:spcPts val="160"/>
               </a:spcAft>
             </a:pPr>
             <a:r>
@@ -3893,13 +3809,13 @@
                 <a:latin typeface="Apple SD Gothic Neo"/>
                 <a:ea typeface="Apple SD Gothic Neo"/>
               </a:rPr>
-              <a:t>원인 — 사전학습에서 채점 범위가 다릅니다:</a:t>
+              <a:t>· 원인은 사전학습의 채점 범위 차이:</a:t>
             </a:r>
           </a:p>
           <a:p>
             <a:pPr algn="l">
               <a:spcAft>
-                <a:spcPts val="150"/>
+                <a:spcPts val="160"/>
               </a:spcAft>
             </a:pPr>
             <a:r>
@@ -3910,7 +3826,7 @@
                 <a:latin typeface="Apple SD Gothic Neo"/>
                 <a:ea typeface="Apple SD Gothic Neo"/>
               </a:rPr>
-              <a:t>· Moirai/BISTRO:  (공변량₁·₂, 타깃)과거 → </a:t>
+              <a:t>  - Moirai/BISTRO:  (공변량, 타깃)과거 → </a:t>
             </a:r>
             <a:r>
               <a:rPr sz="900" b="1">
@@ -3920,13 +3836,13 @@
                 <a:latin typeface="Apple SD Gothic Neo"/>
                 <a:ea typeface="Apple SD Gothic Neo"/>
               </a:rPr>
-              <a:t>(공변량₁·₂, 타깃)미래 전부 채점</a:t>
+              <a:t>(공변량, 타깃)미래 전부 채점</a:t>
             </a:r>
           </a:p>
           <a:p>
             <a:pPr algn="l">
               <a:spcAft>
-                <a:spcPts val="150"/>
+                <a:spcPts val="160"/>
               </a:spcAft>
             </a:pPr>
             <a:r>
@@ -3937,13 +3853,13 @@
                 <a:latin typeface="Apple SD Gothic Neo"/>
                 <a:ea typeface="Apple SD Gothic Neo"/>
               </a:rPr>
-              <a:t>  = 공변량도 함께 예측할 대상(이웃). 거시 미세조정으로도</a:t>
+              <a:t>    = 공변량도 예측 대상(이웃). 거시 미세조정 후에도 구조 동일</a:t>
             </a:r>
           </a:p>
           <a:p>
             <a:pPr algn="l">
               <a:spcAft>
-                <a:spcPts val="150"/>
+                <a:spcPts val="160"/>
               </a:spcAft>
             </a:pPr>
             <a:r>
@@ -3954,40 +3870,40 @@
                 <a:latin typeface="Apple SD Gothic Neo"/>
                 <a:ea typeface="Apple SD Gothic Neo"/>
               </a:rPr>
-              <a:t>  이 채점 구조는 그대로 → 힌트 활용 회로가 약하게 유지</a:t>
-            </a:r>
-          </a:p>
-          <a:p>
-            <a:pPr algn="l">
-              <a:spcAft>
-                <a:spcPts val="150"/>
-              </a:spcAft>
-            </a:pPr>
-            <a:r>
-              <a:rPr sz="900" b="0">
+              <a:t>  - Chronos-2:  (공변량, 타깃)과거 → </a:t>
+            </a:r>
+            <a:r>
+              <a:rPr sz="900" b="1">
                 <a:solidFill>
                   <a:srgbClr val="262626"/>
                 </a:solidFill>
                 <a:latin typeface="Apple SD Gothic Neo"/>
                 <a:ea typeface="Apple SD Gothic Neo"/>
               </a:rPr>
-              <a:t>· Chronos-2:  (공변량₁·₂, 타깃)과거 → </a:t>
-            </a:r>
-            <a:r>
-              <a:rPr sz="900" b="1">
+              <a:t>타깃만 채점</a:t>
+            </a:r>
+          </a:p>
+          <a:p>
+            <a:pPr algn="l">
+              <a:spcAft>
+                <a:spcPts val="160"/>
+              </a:spcAft>
+            </a:pPr>
+            <a:r>
+              <a:rPr sz="900" b="0">
                 <a:solidFill>
                   <a:srgbClr val="262626"/>
                 </a:solidFill>
                 <a:latin typeface="Apple SD Gothic Neo"/>
                 <a:ea typeface="Apple SD Gothic Neo"/>
               </a:rPr>
-              <a:t>타깃 미래만 채점</a:t>
+              <a:t>    = 공변량은 힌트. 힌트 없이는 손실을 줄일 수 없는</a:t>
             </a:r>
           </a:p>
           <a:p>
             <a:pPr algn="l">
               <a:spcAft>
-                <a:spcPts val="150"/>
+                <a:spcPts val="160"/>
               </a:spcAft>
             </a:pPr>
             <a:r>
@@ -3998,13 +3914,13 @@
                 <a:latin typeface="Apple SD Gothic Neo"/>
                 <a:ea typeface="Apple SD Gothic Neo"/>
               </a:rPr>
-              <a:t>  = 공변량은 힌트 — 힌트를 안 보면 손실을 줄일 수 없게</a:t>
+              <a:t>    사례(합성 포함)로 훈련</a:t>
             </a:r>
           </a:p>
           <a:p>
             <a:pPr algn="l">
               <a:spcAft>
-                <a:spcPts val="150"/>
+                <a:spcPts val="160"/>
               </a:spcAft>
             </a:pPr>
             <a:r>
@@ -4015,24 +3931,7 @@
                 <a:latin typeface="Apple SD Gothic Neo"/>
                 <a:ea typeface="Apple SD Gothic Neo"/>
               </a:rPr>
-              <a:t>  의존관계가 설계된 사례(합성 포함)로 훈련</a:t>
-            </a:r>
-          </a:p>
-          <a:p>
-            <a:pPr algn="l">
-              <a:spcAft>
-                <a:spcPts val="150"/>
-              </a:spcAft>
-            </a:pPr>
-            <a:r>
-              <a:rPr sz="850" b="0">
-                <a:solidFill>
-                  <a:srgbClr val="6B6B6B"/>
-                </a:solidFill>
-                <a:latin typeface="Apple SD Gothic Neo"/>
-                <a:ea typeface="Apple SD Gothic Neo"/>
-              </a:rPr>
-              <a:t>· 체급은 비슷(91M vs 120M) — 격차 원인은 체급이 아니라 훈련 방식</a:t>
+              <a:t>· 체급 유사(91M vs 120M) → 격차 원인은 체급이 아닌 훈련 방식</a:t>
             </a:r>
           </a:p>
         </p:txBody>
@@ -4160,7 +4059,7 @@
                 <a:latin typeface="Apple SD Gothic Neo"/>
                 <a:ea typeface="Apple SD Gothic Neo"/>
               </a:rPr>
-              <a:t>유의: BISTRO = BIS WP 1337 (Koyuncu·Kwon·Lombardi·Perez-Cruz·Shin)의</a:t>
+              <a:t>유의  개선폭은 모두 통계적 유의성 미달(DM p&gt;0.18) — 비열등·개선 방향 수위.</a:t>
             </a:r>
           </a:p>
           <a:p>
@@ -4177,7 +4076,7 @@
                 <a:latin typeface="Apple SD Gothic Neo"/>
                 <a:ea typeface="Apple SD Gothic Neo"/>
               </a:rPr>
-              <a:t>공개 원본 체크포인트를 논문 표준 사용법(zero-shot)으로 적용한 실측입니다.</a:t>
+              <a:t>BISTRO는 공개 체크포인트를 논문 표준 사용법(zero-shot) 그대로 적용, 한국</a:t>
             </a:r>
           </a:p>
           <a:p>
@@ -4194,7 +4093,7 @@
                 <a:latin typeface="Apple SD Gothic Neo"/>
                 <a:ea typeface="Apple SD Gothic Neo"/>
               </a:rPr>
-              <a:t>한국 GDP 과제용 추가 미세조정은 미실시. LLM ICL 암은 오염으로 제외.</a:t>
+              <a:t>GDP 과제용 추가 미세조정 없음. 저자: Koyuncu·Kwon·Lombardi·Perez-Cruz·Shin.</a:t>
             </a:r>
           </a:p>
         </p:txBody>
@@ -4234,7 +4133,7 @@
                 <a:latin typeface="Apple SD Gothic Neo"/>
                 <a:ea typeface="Apple SD Gothic Neo"/>
               </a:rPr>
-              <a:t>주: 실시간 빈티지 · 속보치 · w[-19,-1] 평균 RMSE · 2018Q1~2025Q4(32개 분기) · schema v2 · 낮을수록 정확. 슬롯 교체 = early(발표 19~14주 전)=(GBM+부품)÷2, 이후 XGBoost. 개선폭은 모두 통계적 유의성 미달(DM p&gt;0.18) — 비열등+개선 방향 수위.</a:t>
+              <a:t>주: 실시간 빈티지 · 속보치 · w[-19,-1] 평균 RMSE · 2018Q1~2025Q4(32개 분기) · schema v2 · 낮을수록 정확. 슬롯 교체 = 조기(발표 19~14주 전)=(GBM+부품)÷2, 이후 XGBoost. BISTRO 출처: github.com/bis-med-it/bistro (Apache 2.0).</a:t>
             </a:r>
           </a:p>
         </p:txBody>

--- a/docs/부품비교_FM동일프로토콜_1p_2026-08-13.pptx
+++ b/docs/부품비교_FM동일프로토콜_1p_2026-08-13.pptx
@@ -4133,7 +4133,7 @@
                 <a:latin typeface="Apple SD Gothic Neo"/>
                 <a:ea typeface="Apple SD Gothic Neo"/>
               </a:rPr>
-              <a:t>주: 실시간 빈티지 · 속보치 · w[-19,-1] 평균 RMSE · 2018Q1~2025Q4(32개 분기) · schema v2 · 낮을수록 정확. 슬롯 교체 = 조기(발표 19~14주 전)=(GBM+부품)÷2, 이후 XGBoost. BISTRO 출처: github.com/bis-med-it/bistro (Apache 2.0).</a:t>
+              <a:t>주: 실시간 빈티지 · 속보치 · w[-19,-1] 평균 RMSE · 2018Q1~2025Q4(32개 분기) · schema v2 · 낮을수록 정확. 슬롯 교체 = 조기(발표 19~14주 전)=(GBM+부품)÷2, 이후 XGBoost. 조기 경계(-14주)는 예측구간 보정에서 선정의된 값 — 조기 4~7주 어디로 잘라도 0.740~0.741로 동일(경계 비의존). BISTRO 출처: github.com/bis-med-it/bistro (Apache 2.0).</a:t>
             </a:r>
           </a:p>
         </p:txBody>
